--- a/exports/07_quote_heavy.pptx
+++ b/exports/07_quote_heavy.pptx
@@ -502,7 +502,8 @@
           <a:p>
             <a:r>
               <a:rPr lang="en-US" dirty="0"/>
-              <a:t>Quote from Fortune 500 CTO.</a:t>
+              <a:t>Quote from Fortune 500 CTO.
+Source: 07_quote_heavy.pdf</a:t>
             </a:r>
             <a:endParaRPr lang="en-US" dirty="0"/>
           </a:p>
